--- a/Slides/Week01/01：自然語言處理(NLP)概論.pptx
+++ b/Slides/Week01/01：自然語言處理(NLP)概論.pptx
@@ -203,7 +203,7 @@
           <a:p>
             <a:fld id="{F785EE25-D279-4E8A-82B2-242DE63316C2}" type="datetimeFigureOut">
               <a:rPr lang="zh-TW" altLang="en-US" smtClean="0"/>
-              <a:t>2024/3/14</a:t>
+              <a:t>2024/11/13</a:t>
             </a:fld>
             <a:endParaRPr lang="zh-TW" altLang="en-US"/>
           </a:p>
@@ -1535,7 +1535,7 @@
           <a:p>
             <a:fld id="{2CCED9AC-320B-4C15-AB56-B07439D4A17D}" type="datetimeFigureOut">
               <a:rPr lang="zh-TW" altLang="en-US" smtClean="0"/>
-              <a:t>2024/3/14</a:t>
+              <a:t>2024/11/13</a:t>
             </a:fld>
             <a:endParaRPr lang="zh-TW" altLang="en-US"/>
           </a:p>
@@ -1733,7 +1733,7 @@
           <a:p>
             <a:fld id="{2CCED9AC-320B-4C15-AB56-B07439D4A17D}" type="datetimeFigureOut">
               <a:rPr lang="zh-TW" altLang="en-US" smtClean="0"/>
-              <a:t>2024/3/14</a:t>
+              <a:t>2024/11/13</a:t>
             </a:fld>
             <a:endParaRPr lang="zh-TW" altLang="en-US"/>
           </a:p>
@@ -1941,7 +1941,7 @@
           <a:p>
             <a:fld id="{2CCED9AC-320B-4C15-AB56-B07439D4A17D}" type="datetimeFigureOut">
               <a:rPr lang="zh-TW" altLang="en-US" smtClean="0"/>
-              <a:t>2024/3/14</a:t>
+              <a:t>2024/11/13</a:t>
             </a:fld>
             <a:endParaRPr lang="zh-TW" altLang="en-US"/>
           </a:p>
@@ -2322,7 +2322,7 @@
                 </a:solidFill>
               </a:rPr>
               <a:pPr/>
-              <a:t>3/14/2024</a:t>
+              <a:t>11/13/2024</a:t>
             </a:fld>
             <a:endParaRPr kumimoji="0" lang="en-US" dirty="0"/>
           </a:p>
@@ -2553,7 +2553,7 @@
                 </a:solidFill>
               </a:rPr>
               <a:pPr/>
-              <a:t>3/14/2024</a:t>
+              <a:t>11/13/2024</a:t>
             </a:fld>
             <a:endParaRPr kumimoji="0" lang="en-US" dirty="0"/>
           </a:p>
@@ -2786,7 +2786,7 @@
                 </a:solidFill>
               </a:rPr>
               <a:pPr/>
-              <a:t>3/14/2024</a:t>
+              <a:t>11/13/2024</a:t>
             </a:fld>
             <a:endParaRPr kumimoji="0" lang="en-US" dirty="0"/>
           </a:p>
@@ -3268,7 +3268,7 @@
                 </a:solidFill>
               </a:rPr>
               <a:pPr/>
-              <a:t>3/14/2024</a:t>
+              <a:t>11/13/2024</a:t>
             </a:fld>
             <a:endParaRPr kumimoji="0" lang="en-US" dirty="0"/>
           </a:p>
@@ -3625,7 +3625,7 @@
                 </a:solidFill>
               </a:rPr>
               <a:pPr/>
-              <a:t>3/14/2024</a:t>
+              <a:t>11/13/2024</a:t>
             </a:fld>
             <a:endParaRPr kumimoji="0" lang="en-US" dirty="0"/>
           </a:p>
@@ -3988,7 +3988,7 @@
                 </a:solidFill>
               </a:rPr>
               <a:pPr/>
-              <a:t>3/14/2024</a:t>
+              <a:t>11/13/2024</a:t>
             </a:fld>
             <a:endParaRPr kumimoji="0" lang="en-US" dirty="0"/>
           </a:p>
@@ -4298,7 +4298,7 @@
                 </a:solidFill>
               </a:rPr>
               <a:pPr/>
-              <a:t>3/14/2024</a:t>
+              <a:t>11/13/2024</a:t>
             </a:fld>
             <a:endParaRPr kumimoji="0" lang="en-US" dirty="0"/>
           </a:p>
@@ -4493,7 +4493,7 @@
           <a:p>
             <a:fld id="{2CCED9AC-320B-4C15-AB56-B07439D4A17D}" type="datetimeFigureOut">
               <a:rPr lang="zh-TW" altLang="en-US" smtClean="0"/>
-              <a:t>2024/3/14</a:t>
+              <a:t>2024/11/13</a:t>
             </a:fld>
             <a:endParaRPr lang="zh-TW" altLang="en-US"/>
           </a:p>
@@ -4977,7 +4977,7 @@
                 </a:solidFill>
               </a:rPr>
               <a:pPr/>
-              <a:t>3/14/2024</a:t>
+              <a:t>11/13/2024</a:t>
             </a:fld>
             <a:endParaRPr kumimoji="0" lang="en-US" dirty="0"/>
           </a:p>
@@ -5373,7 +5373,7 @@
                 </a:solidFill>
               </a:rPr>
               <a:pPr/>
-              <a:t>3/14/2024</a:t>
+              <a:t>11/13/2024</a:t>
             </a:fld>
             <a:endParaRPr kumimoji="0" lang="en-US" dirty="0"/>
           </a:p>
@@ -5713,7 +5713,7 @@
                 </a:solidFill>
               </a:rPr>
               <a:pPr/>
-              <a:t>3/14/2024</a:t>
+              <a:t>11/13/2024</a:t>
             </a:fld>
             <a:endParaRPr kumimoji="0" lang="en-US" dirty="0"/>
           </a:p>
@@ -6294,7 +6294,7 @@
                 </a:solidFill>
               </a:rPr>
               <a:pPr/>
-              <a:t>3/14/2024</a:t>
+              <a:t>11/13/2024</a:t>
             </a:fld>
             <a:endParaRPr kumimoji="0" lang="en-US" dirty="0"/>
           </a:p>
@@ -6863,7 +6863,7 @@
                 </a:solidFill>
               </a:rPr>
               <a:pPr/>
-              <a:t>3/14/2024</a:t>
+              <a:t>11/13/2024</a:t>
             </a:fld>
             <a:endParaRPr kumimoji="0" lang="en-US" dirty="0"/>
           </a:p>
@@ -7327,7 +7327,7 @@
                 </a:solidFill>
               </a:rPr>
               <a:pPr/>
-              <a:t>3/14/2024</a:t>
+              <a:t>11/13/2024</a:t>
             </a:fld>
             <a:endParaRPr kumimoji="0" lang="en-US" dirty="0"/>
           </a:p>
@@ -7756,7 +7756,7 @@
                 </a:solidFill>
               </a:rPr>
               <a:pPr/>
-              <a:t>3/14/2024</a:t>
+              <a:t>11/13/2024</a:t>
             </a:fld>
             <a:endParaRPr kumimoji="0" lang="en-US" dirty="0"/>
           </a:p>
@@ -8265,7 +8265,7 @@
                 </a:solidFill>
               </a:rPr>
               <a:pPr/>
-              <a:t>3/14/2024</a:t>
+              <a:t>11/13/2024</a:t>
             </a:fld>
             <a:endParaRPr kumimoji="0" lang="en-US" dirty="0"/>
           </a:p>
@@ -8774,7 +8774,7 @@
                 </a:solidFill>
               </a:rPr>
               <a:pPr/>
-              <a:t>3/14/2024</a:t>
+              <a:t>11/13/2024</a:t>
             </a:fld>
             <a:endParaRPr kumimoji="0" lang="en-US" dirty="0"/>
           </a:p>
@@ -8995,7 +8995,7 @@
                 </a:solidFill>
               </a:rPr>
               <a:pPr/>
-              <a:t>3/14/2024</a:t>
+              <a:t>11/13/2024</a:t>
             </a:fld>
             <a:endParaRPr kumimoji="0" lang="en-US" dirty="0"/>
           </a:p>
@@ -9267,7 +9267,7 @@
           <a:p>
             <a:fld id="{2CCED9AC-320B-4C15-AB56-B07439D4A17D}" type="datetimeFigureOut">
               <a:rPr lang="zh-TW" altLang="en-US" smtClean="0"/>
-              <a:t>2024/3/14</a:t>
+              <a:t>2024/11/13</a:t>
             </a:fld>
             <a:endParaRPr lang="zh-TW" altLang="en-US"/>
           </a:p>
@@ -9603,7 +9603,7 @@
                 </a:solidFill>
               </a:rPr>
               <a:pPr/>
-              <a:t>3/14/2024</a:t>
+              <a:t>11/13/2024</a:t>
             </a:fld>
             <a:endParaRPr kumimoji="0" lang="en-US" dirty="0"/>
           </a:p>
@@ -9827,7 +9827,7 @@
                 </a:solidFill>
               </a:rPr>
               <a:pPr/>
-              <a:t>3/14/2024</a:t>
+              <a:t>11/13/2024</a:t>
             </a:fld>
             <a:endParaRPr kumimoji="0" lang="en-US" dirty="0"/>
           </a:p>
@@ -10008,7 +10008,7 @@
             <a:fld id="{ACB2EC6F-6501-4E04-BD6C-A8A6CABB2C5B}" type="datetimeFigureOut">
               <a:rPr kumimoji="0" lang="en-US" smtClean="0"/>
               <a:pPr/>
-              <a:t>3/14/2024</a:t>
+              <a:t>11/13/2024</a:t>
             </a:fld>
             <a:endParaRPr kumimoji="0" lang="en-US" dirty="0"/>
           </a:p>
@@ -10292,7 +10292,7 @@
           <a:p>
             <a:fld id="{2CCED9AC-320B-4C15-AB56-B07439D4A17D}" type="datetimeFigureOut">
               <a:rPr lang="zh-TW" altLang="en-US" smtClean="0"/>
-              <a:t>2024/3/14</a:t>
+              <a:t>2024/11/13</a:t>
             </a:fld>
             <a:endParaRPr lang="zh-TW" altLang="en-US"/>
           </a:p>
@@ -10704,7 +10704,7 @@
           <a:p>
             <a:fld id="{2CCED9AC-320B-4C15-AB56-B07439D4A17D}" type="datetimeFigureOut">
               <a:rPr lang="zh-TW" altLang="en-US" smtClean="0"/>
-              <a:t>2024/3/14</a:t>
+              <a:t>2024/11/13</a:t>
             </a:fld>
             <a:endParaRPr lang="zh-TW" altLang="en-US"/>
           </a:p>
@@ -10845,7 +10845,7 @@
           <a:p>
             <a:fld id="{2CCED9AC-320B-4C15-AB56-B07439D4A17D}" type="datetimeFigureOut">
               <a:rPr lang="zh-TW" altLang="en-US" smtClean="0"/>
-              <a:t>2024/3/14</a:t>
+              <a:t>2024/11/13</a:t>
             </a:fld>
             <a:endParaRPr lang="zh-TW" altLang="en-US"/>
           </a:p>
@@ -10958,7 +10958,7 @@
           <a:p>
             <a:fld id="{2CCED9AC-320B-4C15-AB56-B07439D4A17D}" type="datetimeFigureOut">
               <a:rPr lang="zh-TW" altLang="en-US" smtClean="0"/>
-              <a:t>2024/3/14</a:t>
+              <a:t>2024/11/13</a:t>
             </a:fld>
             <a:endParaRPr lang="zh-TW" altLang="en-US"/>
           </a:p>
@@ -11269,7 +11269,7 @@
           <a:p>
             <a:fld id="{2CCED9AC-320B-4C15-AB56-B07439D4A17D}" type="datetimeFigureOut">
               <a:rPr lang="zh-TW" altLang="en-US" smtClean="0"/>
-              <a:t>2024/3/14</a:t>
+              <a:t>2024/11/13</a:t>
             </a:fld>
             <a:endParaRPr lang="zh-TW" altLang="en-US"/>
           </a:p>
@@ -11557,7 +11557,7 @@
           <a:p>
             <a:fld id="{2CCED9AC-320B-4C15-AB56-B07439D4A17D}" type="datetimeFigureOut">
               <a:rPr lang="zh-TW" altLang="en-US" smtClean="0"/>
-              <a:t>2024/3/14</a:t>
+              <a:t>2024/11/13</a:t>
             </a:fld>
             <a:endParaRPr lang="zh-TW" altLang="en-US"/>
           </a:p>
@@ -11798,7 +11798,7 @@
           <a:p>
             <a:fld id="{2CCED9AC-320B-4C15-AB56-B07439D4A17D}" type="datetimeFigureOut">
               <a:rPr lang="zh-TW" altLang="en-US" smtClean="0"/>
-              <a:t>2024/3/14</a:t>
+              <a:t>2024/11/13</a:t>
             </a:fld>
             <a:endParaRPr lang="zh-TW" altLang="en-US"/>
           </a:p>
@@ -12370,7 +12370,7 @@
                 </a:solidFill>
               </a:rPr>
               <a:pPr/>
-              <a:t>3/14/2024</a:t>
+              <a:t>11/13/2024</a:t>
             </a:fld>
             <a:endParaRPr kumimoji="0" lang="en-US" sz="1200" dirty="0">
               <a:solidFill>
@@ -12927,7 +12927,7 @@
         <p:spPr>
           <a:xfrm>
             <a:off x="685800" y="1841244"/>
-            <a:ext cx="8077200" cy="2554545"/>
+            <a:ext cx="8077200" cy="3539430"/>
           </a:xfrm>
           <a:prstGeom prst="rect">
             <a:avLst/>
@@ -12939,6 +12939,29 @@
             <a:spAutoFit/>
           </a:bodyPr>
           <a:lstStyle/>
+          <a:p>
+            <a:pPr marL="361950" indent="-361950">
+              <a:buFont typeface="Arial" panose="020B0604020202020204" pitchFamily="34" charset="0"/>
+              <a:buChar char="•"/>
+            </a:pPr>
+            <a:r>
+              <a:rPr lang="zh-TW" altLang="en-US" sz="3200" dirty="0">
+                <a:solidFill>
+                  <a:prstClr val="white"/>
+                </a:solidFill>
+                <a:latin typeface="微軟正黑體" panose="020B0604030504040204" pitchFamily="34" charset="-120"/>
+                <a:ea typeface="微軟正黑體" panose="020B0604030504040204" pitchFamily="34" charset="-120"/>
+              </a:rPr>
+              <a:t>什麼是語言：人類對於世界理解的抽象</a:t>
+            </a:r>
+            <a:endParaRPr lang="en-US" altLang="zh-TW" sz="3200" dirty="0">
+              <a:solidFill>
+                <a:prstClr val="white"/>
+              </a:solidFill>
+              <a:latin typeface="微軟正黑體" panose="020B0604030504040204" pitchFamily="34" charset="-120"/>
+              <a:ea typeface="微軟正黑體" panose="020B0604030504040204" pitchFamily="34" charset="-120"/>
+            </a:endParaRPr>
+          </a:p>
           <a:p>
             <a:pPr marL="361950" indent="-361950">
               <a:buFont typeface="Arial" panose="020B0604020202020204" pitchFamily="34" charset="0"/>
@@ -13153,6 +13176,48 @@
               <a:ea typeface="微軟正黑體" panose="020B0604030504040204" pitchFamily="34" charset="-120"/>
               <a:cs typeface="Heiti TC Light"/>
             </a:endParaRPr>
+          </a:p>
+          <a:p>
+            <a:pPr marL="361950" indent="-361950">
+              <a:buFont typeface="Arial" panose="020B0604020202020204" pitchFamily="34" charset="0"/>
+              <a:buChar char="•"/>
+            </a:pPr>
+            <a:r>
+              <a:rPr kumimoji="1" lang="zh-TW" altLang="en-US" sz="3200" dirty="0">
+                <a:solidFill>
+                  <a:prstClr val="white"/>
+                </a:solidFill>
+                <a:effectLst>
+                  <a:outerShdw blurRad="38100" dist="38100" dir="2700000" algn="tl">
+                    <a:srgbClr val="000000">
+                      <a:alpha val="43137"/>
+                    </a:srgbClr>
+                  </a:outerShdw>
+                </a:effectLst>
+                <a:latin typeface="微軟正黑體" panose="020B0604030504040204" pitchFamily="34" charset="-120"/>
+                <a:ea typeface="微軟正黑體" panose="020B0604030504040204" pitchFamily="34" charset="-120"/>
+                <a:cs typeface="Heiti TC Light"/>
+              </a:rPr>
+              <a:t>語音的範圍稱為</a:t>
+            </a:r>
+            <a:r>
+              <a:rPr kumimoji="1" lang="en-US" altLang="zh-TW" sz="3200" dirty="0">
+                <a:solidFill>
+                  <a:prstClr val="white"/>
+                </a:solidFill>
+                <a:effectLst>
+                  <a:outerShdw blurRad="38100" dist="38100" dir="2700000" algn="tl">
+                    <a:srgbClr val="000000">
+                      <a:alpha val="43137"/>
+                    </a:srgbClr>
+                  </a:outerShdw>
+                </a:effectLst>
+                <a:latin typeface="微軟正黑體" panose="020B0604030504040204" pitchFamily="34" charset="-120"/>
+                <a:ea typeface="微軟正黑體" panose="020B0604030504040204" pitchFamily="34" charset="-120"/>
+                <a:cs typeface="Heiti TC Light"/>
+              </a:rPr>
+              <a:t>H(Human)LP</a:t>
+            </a:r>
           </a:p>
         </p:txBody>
       </p:sp>
@@ -14190,7 +14255,7 @@
                 <a:ea typeface="微軟正黑體" panose="020B0604030504040204" pitchFamily="34" charset="-120"/>
                 <a:cs typeface="Heiti TC Light"/>
               </a:rPr>
-              <a:t>統計、機率、人工智慧</a:t>
+              <a:t>統計、機率、神經模型、人工智慧</a:t>
             </a:r>
             <a:r>
               <a:rPr kumimoji="1" lang="en-US" altLang="zh-TW" sz="3200" dirty="0">
@@ -14592,7 +14657,7 @@
         <p:spPr>
           <a:xfrm>
             <a:off x="685800" y="1513746"/>
-            <a:ext cx="8077200" cy="6001643"/>
+            <a:ext cx="8077200" cy="6124754"/>
           </a:xfrm>
           <a:prstGeom prst="rect">
             <a:avLst/>
@@ -14610,7 +14675,7 @@
               <a:buChar char="•"/>
             </a:pPr>
             <a:r>
-              <a:rPr kumimoji="1" lang="zh-TW" altLang="en-US" sz="3200" dirty="0">
+              <a:rPr kumimoji="1" lang="zh-TW" altLang="en-US" sz="2800" dirty="0">
                 <a:solidFill>
                   <a:prstClr val="white"/>
                 </a:solidFill>
@@ -14627,7 +14692,7 @@
               </a:rPr>
               <a:t>基於規則的方法</a:t>
             </a:r>
-            <a:endParaRPr kumimoji="1" lang="en-US" altLang="zh-TW" sz="3200" dirty="0">
+            <a:endParaRPr kumimoji="1" lang="en-US" altLang="zh-TW" sz="2800" dirty="0">
               <a:solidFill>
                 <a:prstClr val="white"/>
               </a:solidFill>
@@ -14649,7 +14714,7 @@
               <a:buChar char="•"/>
             </a:pPr>
             <a:r>
-              <a:rPr kumimoji="1" lang="zh-TW" altLang="en-US" sz="3200" dirty="0">
+              <a:rPr kumimoji="1" lang="zh-TW" altLang="en-US" sz="2800" dirty="0">
                 <a:solidFill>
                   <a:prstClr val="white"/>
                 </a:solidFill>
@@ -14666,7 +14731,7 @@
               </a:rPr>
               <a:t>基於統計學的方法</a:t>
             </a:r>
-            <a:endParaRPr kumimoji="1" lang="en-US" altLang="zh-TW" sz="3200" dirty="0">
+            <a:endParaRPr kumimoji="1" lang="en-US" altLang="zh-TW" sz="2800" dirty="0">
               <a:solidFill>
                 <a:prstClr val="white"/>
               </a:solidFill>
@@ -14688,7 +14753,7 @@
               <a:buChar char="•"/>
             </a:pPr>
             <a:r>
-              <a:rPr kumimoji="1" lang="zh-TW" altLang="en-US" sz="3200" dirty="0">
+              <a:rPr kumimoji="1" lang="zh-TW" altLang="en-US" sz="2800" dirty="0">
                 <a:solidFill>
                   <a:prstClr val="white"/>
                 </a:solidFill>
@@ -14706,7 +14771,7 @@
               <a:t>一般統計學方法</a:t>
             </a:r>
             <a:r>
-              <a:rPr kumimoji="1" lang="en-US" altLang="zh-TW" sz="3200" dirty="0">
+              <a:rPr kumimoji="1" lang="en-US" altLang="zh-TW" sz="2800" dirty="0">
                 <a:solidFill>
                   <a:prstClr val="white"/>
                 </a:solidFill>
@@ -14724,7 +14789,7 @@
               <a:t>(</a:t>
             </a:r>
             <a:r>
-              <a:rPr kumimoji="1" lang="en-US" altLang="zh-TW" sz="3200" dirty="0" err="1">
+              <a:rPr kumimoji="1" lang="en-US" altLang="zh-TW" sz="2800" dirty="0" err="1">
                 <a:solidFill>
                   <a:prstClr val="white"/>
                 </a:solidFill>
@@ -14742,7 +14807,7 @@
               <a:t>e.g</a:t>
             </a:r>
             <a:r>
-              <a:rPr kumimoji="1" lang="zh-TW" altLang="en-US" sz="3200" dirty="0">
+              <a:rPr kumimoji="1" lang="zh-TW" altLang="en-US" sz="2800" dirty="0">
                 <a:solidFill>
                   <a:prstClr val="white"/>
                 </a:solidFill>
@@ -14760,7 +14825,7 @@
               <a:t>：</a:t>
             </a:r>
             <a:r>
-              <a:rPr kumimoji="1" lang="en-US" altLang="zh-TW" sz="3200" dirty="0">
+              <a:rPr kumimoji="1" lang="en-US" altLang="zh-TW" sz="2800" dirty="0">
                 <a:solidFill>
                   <a:prstClr val="white"/>
                 </a:solidFill>
@@ -14778,7 +14843,7 @@
               <a:t>n</a:t>
             </a:r>
             <a:r>
-              <a:rPr kumimoji="1" lang="zh-TW" altLang="en-US" sz="3200" dirty="0">
+              <a:rPr kumimoji="1" lang="zh-TW" altLang="en-US" sz="2800" dirty="0">
                 <a:solidFill>
                   <a:prstClr val="white"/>
                 </a:solidFill>
@@ -14796,7 +14861,7 @@
               <a:t>元語言模型</a:t>
             </a:r>
             <a:r>
-              <a:rPr kumimoji="1" lang="en-US" altLang="zh-TW" sz="3200" dirty="0">
+              <a:rPr kumimoji="1" lang="en-US" altLang="zh-TW" sz="2800" dirty="0">
                 <a:solidFill>
                   <a:prstClr val="white"/>
                 </a:solidFill>
@@ -14820,7 +14885,7 @@
               <a:buChar char="•"/>
             </a:pPr>
             <a:r>
-              <a:rPr kumimoji="1" lang="zh-TW" altLang="en-US" sz="3200" dirty="0">
+              <a:rPr kumimoji="1" lang="zh-TW" altLang="en-US" sz="2800" dirty="0">
                 <a:solidFill>
                   <a:prstClr val="white"/>
                 </a:solidFill>
@@ -14838,7 +14903,7 @@
               <a:t>機器學習</a:t>
             </a:r>
             <a:r>
-              <a:rPr kumimoji="1" lang="en-US" altLang="zh-TW" sz="3200" dirty="0">
+              <a:rPr kumimoji="1" lang="en-US" altLang="zh-TW" sz="2800" dirty="0">
                 <a:solidFill>
                   <a:prstClr val="white"/>
                 </a:solidFill>
@@ -14856,7 +14921,7 @@
               <a:t>(</a:t>
             </a:r>
             <a:r>
-              <a:rPr kumimoji="1" lang="zh-TW" altLang="en-US" sz="3200" dirty="0">
+              <a:rPr kumimoji="1" lang="zh-TW" altLang="en-US" sz="2800" dirty="0">
                 <a:solidFill>
                   <a:prstClr val="white"/>
                 </a:solidFill>
@@ -14874,7 +14939,7 @@
               <a:t>非神經網路，如</a:t>
             </a:r>
             <a:r>
-              <a:rPr kumimoji="1" lang="en-US" altLang="zh-TW" sz="3200" dirty="0">
+              <a:rPr kumimoji="1" lang="en-US" altLang="zh-TW" sz="2800" dirty="0">
                 <a:solidFill>
                   <a:prstClr val="white"/>
                 </a:solidFill>
@@ -14892,7 +14957,7 @@
               <a:t>LR</a:t>
             </a:r>
             <a:r>
-              <a:rPr kumimoji="1" lang="zh-TW" altLang="en-US" sz="3200" dirty="0">
+              <a:rPr kumimoji="1" lang="zh-TW" altLang="en-US" sz="2800" dirty="0">
                 <a:solidFill>
                   <a:prstClr val="white"/>
                 </a:solidFill>
@@ -14910,7 +14975,7 @@
               <a:t>、</a:t>
             </a:r>
             <a:r>
-              <a:rPr kumimoji="1" lang="en-US" altLang="zh-TW" sz="3200" dirty="0">
+              <a:rPr kumimoji="1" lang="en-US" altLang="zh-TW" sz="2800" dirty="0">
                 <a:solidFill>
                   <a:prstClr val="white"/>
                 </a:solidFill>
@@ -14934,7 +14999,7 @@
               <a:buChar char="•"/>
             </a:pPr>
             <a:r>
-              <a:rPr kumimoji="1" lang="zh-TW" altLang="en-US" sz="3200" dirty="0">
+              <a:rPr kumimoji="1" lang="zh-TW" altLang="en-US" sz="2800" dirty="0">
                 <a:solidFill>
                   <a:prstClr val="white"/>
                 </a:solidFill>
@@ -14952,7 +15017,7 @@
               <a:t>基於神經網路的方法</a:t>
             </a:r>
             <a:r>
-              <a:rPr kumimoji="1" lang="en-US" altLang="zh-TW" sz="3200" dirty="0">
+              <a:rPr kumimoji="1" lang="en-US" altLang="zh-TW" sz="2800" dirty="0">
                 <a:solidFill>
                   <a:prstClr val="white"/>
                 </a:solidFill>
@@ -14970,7 +15035,7 @@
               <a:t>(</a:t>
             </a:r>
             <a:r>
-              <a:rPr kumimoji="1" lang="zh-TW" altLang="en-US" sz="3200" dirty="0">
+              <a:rPr kumimoji="1" lang="zh-TW" altLang="en-US" sz="2800" dirty="0">
                 <a:solidFill>
                   <a:prstClr val="white"/>
                 </a:solidFill>
@@ -14988,7 +15053,7 @@
               <a:t>也算統計方法</a:t>
             </a:r>
             <a:r>
-              <a:rPr kumimoji="1" lang="en-US" altLang="zh-TW" sz="3200" dirty="0">
+              <a:rPr kumimoji="1" lang="en-US" altLang="zh-TW" sz="2800" dirty="0">
                 <a:solidFill>
                   <a:prstClr val="white"/>
                 </a:solidFill>
@@ -15012,7 +15077,7 @@
               <a:buChar char="•"/>
             </a:pPr>
             <a:r>
-              <a:rPr kumimoji="1" lang="en-US" altLang="zh-TW" sz="3200" dirty="0">
+              <a:rPr kumimoji="1" lang="en-US" altLang="zh-TW" sz="2800" dirty="0">
                 <a:solidFill>
                   <a:prstClr val="white"/>
                 </a:solidFill>
@@ -15030,7 +15095,7 @@
               <a:t>RNN</a:t>
             </a:r>
             <a:r>
-              <a:rPr kumimoji="1" lang="zh-TW" altLang="en-US" sz="3200" dirty="0">
+              <a:rPr kumimoji="1" lang="zh-TW" altLang="en-US" sz="2800" dirty="0">
                 <a:solidFill>
                   <a:prstClr val="white"/>
                 </a:solidFill>
@@ -15047,7 +15112,7 @@
               </a:rPr>
               <a:t>類</a:t>
             </a:r>
-            <a:endParaRPr kumimoji="1" lang="en-US" altLang="zh-TW" sz="3200" dirty="0">
+            <a:endParaRPr kumimoji="1" lang="en-US" altLang="zh-TW" sz="2800" dirty="0">
               <a:solidFill>
                 <a:prstClr val="white"/>
               </a:solidFill>
@@ -15069,7 +15134,7 @@
               <a:buChar char="•"/>
             </a:pPr>
             <a:r>
-              <a:rPr kumimoji="1" lang="en-US" altLang="zh-TW" sz="3200" dirty="0">
+              <a:rPr kumimoji="1" lang="en-US" altLang="zh-TW" sz="2800" dirty="0">
                 <a:solidFill>
                   <a:prstClr val="white"/>
                 </a:solidFill>
@@ -15087,7 +15152,7 @@
               <a:t>Transformer</a:t>
             </a:r>
             <a:r>
-              <a:rPr kumimoji="1" lang="zh-TW" altLang="en-US" sz="3200" dirty="0">
+              <a:rPr kumimoji="1" lang="zh-TW" altLang="en-US" sz="2800" dirty="0">
                 <a:solidFill>
                   <a:prstClr val="white"/>
                 </a:solidFill>
@@ -15104,7 +15169,7 @@
               </a:rPr>
               <a:t>類</a:t>
             </a:r>
-            <a:endParaRPr kumimoji="1" lang="en-US" altLang="zh-TW" sz="3200" dirty="0">
+            <a:endParaRPr kumimoji="1" lang="en-US" altLang="zh-TW" sz="2800" dirty="0">
               <a:solidFill>
                 <a:prstClr val="white"/>
               </a:solidFill>
@@ -15126,7 +15191,7 @@
               <a:buChar char="•"/>
             </a:pPr>
             <a:r>
-              <a:rPr kumimoji="1" lang="zh-TW" altLang="en-US" sz="3200" dirty="0">
+              <a:rPr kumimoji="1" lang="zh-TW" altLang="en-US" sz="2800" dirty="0">
                 <a:solidFill>
                   <a:prstClr val="white"/>
                 </a:solidFill>
@@ -15141,9 +15206,9 @@
                 <a:ea typeface="微軟正黑體" panose="020B0604030504040204" pitchFamily="34" charset="-120"/>
                 <a:cs typeface="Heiti TC Light"/>
               </a:rPr>
-              <a:t>基於大型語言模型的方法</a:t>
-            </a:r>
-            <a:endParaRPr kumimoji="1" lang="en-US" altLang="zh-TW" sz="3200" dirty="0">
+              <a:t>基於語言模型的方法</a:t>
+            </a:r>
+            <a:endParaRPr kumimoji="1" lang="en-US" altLang="zh-TW" sz="2800" dirty="0">
               <a:solidFill>
                 <a:prstClr val="white"/>
               </a:solidFill>
@@ -15165,7 +15230,7 @@
               <a:buChar char="•"/>
             </a:pPr>
             <a:r>
-              <a:rPr kumimoji="1" lang="zh-TW" altLang="en-US" sz="3200" dirty="0">
+              <a:rPr kumimoji="1" lang="zh-TW" altLang="en-US" sz="2800" dirty="0">
                 <a:solidFill>
                   <a:prstClr val="white"/>
                 </a:solidFill>
@@ -15183,7 +15248,7 @@
               <a:t>預訓練</a:t>
             </a:r>
             <a:r>
-              <a:rPr kumimoji="1" lang="en-US" altLang="zh-TW" sz="3200" dirty="0">
+              <a:rPr kumimoji="1" lang="en-US" altLang="zh-TW" sz="2800" dirty="0">
                 <a:solidFill>
                   <a:prstClr val="white"/>
                 </a:solidFill>
@@ -15201,7 +15266,7 @@
               <a:t>+</a:t>
             </a:r>
             <a:r>
-              <a:rPr kumimoji="1" lang="zh-TW" altLang="en-US" sz="3200" dirty="0">
+              <a:rPr kumimoji="1" lang="zh-TW" altLang="en-US" sz="2800" dirty="0">
                 <a:solidFill>
                   <a:prstClr val="white"/>
                 </a:solidFill>
@@ -15218,49 +15283,7 @@
               </a:rPr>
               <a:t>微調</a:t>
             </a:r>
-            <a:r>
-              <a:rPr kumimoji="1" lang="en-US" altLang="zh-TW" sz="3200" dirty="0">
-                <a:solidFill>
-                  <a:prstClr val="white"/>
-                </a:solidFill>
-                <a:effectLst>
-                  <a:outerShdw blurRad="38100" dist="38100" dir="2700000" algn="tl">
-                    <a:srgbClr val="000000">
-                      <a:alpha val="43137"/>
-                    </a:srgbClr>
-                  </a:outerShdw>
-                </a:effectLst>
-                <a:latin typeface="微軟正黑體" panose="020B0604030504040204" pitchFamily="34" charset="-120"/>
-                <a:ea typeface="微軟正黑體" panose="020B0604030504040204" pitchFamily="34" charset="-120"/>
-                <a:cs typeface="Heiti TC Light"/>
-              </a:rPr>
-              <a:t>+RLHF</a:t>
-            </a:r>
-          </a:p>
-          <a:p>
-            <a:pPr marL="817563" lvl="2" indent="-360363">
-              <a:buFont typeface="Arial" panose="020B0604020202020204" pitchFamily="34" charset="0"/>
-              <a:buChar char="•"/>
-            </a:pPr>
-            <a:r>
-              <a:rPr kumimoji="1" lang="zh-TW" altLang="en-US" sz="3200" dirty="0">
-                <a:solidFill>
-                  <a:prstClr val="white"/>
-                </a:solidFill>
-                <a:effectLst>
-                  <a:outerShdw blurRad="38100" dist="38100" dir="2700000" algn="tl">
-                    <a:srgbClr val="000000">
-                      <a:alpha val="43137"/>
-                    </a:srgbClr>
-                  </a:outerShdw>
-                </a:effectLst>
-                <a:latin typeface="微軟正黑體" panose="020B0604030504040204" pitchFamily="34" charset="-120"/>
-                <a:ea typeface="微軟正黑體" panose="020B0604030504040204" pitchFamily="34" charset="-120"/>
-                <a:cs typeface="Heiti TC Light"/>
-              </a:rPr>
-              <a:t>不訓練微調，用提示語工程</a:t>
-            </a:r>
-            <a:endParaRPr kumimoji="1" lang="en-US" altLang="zh-TW" sz="3200" dirty="0">
+            <a:endParaRPr kumimoji="1" lang="en-US" altLang="zh-TW" sz="2800" dirty="0">
               <a:solidFill>
                 <a:prstClr val="white"/>
               </a:solidFill>
@@ -15277,11 +15300,29 @@
             </a:endParaRPr>
           </a:p>
           <a:p>
-            <a:pPr marL="817563" lvl="2" indent="-360363">
+            <a:pPr marL="361950" indent="-361950">
               <a:buFont typeface="Arial" panose="020B0604020202020204" pitchFamily="34" charset="0"/>
               <a:buChar char="•"/>
             </a:pPr>
-            <a:endParaRPr kumimoji="1" lang="en-US" altLang="zh-TW" sz="3200" dirty="0">
+            <a:r>
+              <a:rPr kumimoji="1" lang="zh-TW" altLang="en-US" sz="2800" dirty="0">
+                <a:solidFill>
+                  <a:prstClr val="white"/>
+                </a:solidFill>
+                <a:effectLst>
+                  <a:outerShdw blurRad="38100" dist="38100" dir="2700000" algn="tl">
+                    <a:srgbClr val="000000">
+                      <a:alpha val="43137"/>
+                    </a:srgbClr>
+                  </a:outerShdw>
+                </a:effectLst>
+                <a:latin typeface="微軟正黑體" panose="020B0604030504040204" pitchFamily="34" charset="-120"/>
+                <a:ea typeface="微軟正黑體" panose="020B0604030504040204" pitchFamily="34" charset="-120"/>
+                <a:cs typeface="Heiti TC Light"/>
+              </a:rPr>
+              <a:t>基於大型語言模型</a:t>
+            </a:r>
+            <a:endParaRPr kumimoji="1" lang="en-US" altLang="zh-TW" sz="2800" dirty="0">
               <a:solidFill>
                 <a:prstClr val="white"/>
               </a:solidFill>
@@ -15298,11 +15339,146 @@
             </a:endParaRPr>
           </a:p>
           <a:p>
+            <a:pPr marL="819150" lvl="1" indent="-361950">
+              <a:buFont typeface="Arial" panose="020B0604020202020204" pitchFamily="34" charset="0"/>
+              <a:buChar char="•"/>
+            </a:pPr>
+            <a:r>
+              <a:rPr kumimoji="1" lang="zh-TW" altLang="en-US" sz="2800" dirty="0">
+                <a:solidFill>
+                  <a:prstClr val="white"/>
+                </a:solidFill>
+                <a:effectLst>
+                  <a:outerShdw blurRad="38100" dist="38100" dir="2700000" algn="tl">
+                    <a:srgbClr val="000000">
+                      <a:alpha val="43137"/>
+                    </a:srgbClr>
+                  </a:outerShdw>
+                </a:effectLst>
+                <a:latin typeface="微軟正黑體" panose="020B0604030504040204" pitchFamily="34" charset="-120"/>
+                <a:ea typeface="微軟正黑體" panose="020B0604030504040204" pitchFamily="34" charset="-120"/>
+                <a:cs typeface="Heiti TC Light"/>
+              </a:rPr>
+              <a:t>預訓練</a:t>
+            </a:r>
+            <a:r>
+              <a:rPr kumimoji="1" lang="en-US" altLang="zh-TW" sz="2800" dirty="0">
+                <a:solidFill>
+                  <a:prstClr val="white"/>
+                </a:solidFill>
+                <a:effectLst>
+                  <a:outerShdw blurRad="38100" dist="38100" dir="2700000" algn="tl">
+                    <a:srgbClr val="000000">
+                      <a:alpha val="43137"/>
+                    </a:srgbClr>
+                  </a:outerShdw>
+                </a:effectLst>
+                <a:latin typeface="微軟正黑體" panose="020B0604030504040204" pitchFamily="34" charset="-120"/>
+                <a:ea typeface="微軟正黑體" panose="020B0604030504040204" pitchFamily="34" charset="-120"/>
+                <a:cs typeface="Heiti TC Light"/>
+              </a:rPr>
+              <a:t>+</a:t>
+            </a:r>
+            <a:r>
+              <a:rPr kumimoji="1" lang="zh-TW" altLang="en-US" sz="2800" dirty="0">
+                <a:solidFill>
+                  <a:prstClr val="white"/>
+                </a:solidFill>
+                <a:effectLst>
+                  <a:outerShdw blurRad="38100" dist="38100" dir="2700000" algn="tl">
+                    <a:srgbClr val="000000">
+                      <a:alpha val="43137"/>
+                    </a:srgbClr>
+                  </a:outerShdw>
+                </a:effectLst>
+                <a:latin typeface="微軟正黑體" panose="020B0604030504040204" pitchFamily="34" charset="-120"/>
+                <a:ea typeface="微軟正黑體" panose="020B0604030504040204" pitchFamily="34" charset="-120"/>
+                <a:cs typeface="Heiti TC Light"/>
+              </a:rPr>
+              <a:t>微調</a:t>
+            </a:r>
+            <a:endParaRPr kumimoji="1" lang="en-US" altLang="zh-TW" sz="2800" dirty="0">
+              <a:solidFill>
+                <a:prstClr val="white"/>
+              </a:solidFill>
+              <a:effectLst>
+                <a:outerShdw blurRad="38100" dist="38100" dir="2700000" algn="tl">
+                  <a:srgbClr val="000000">
+                    <a:alpha val="43137"/>
+                  </a:srgbClr>
+                </a:outerShdw>
+              </a:effectLst>
+              <a:latin typeface="微軟正黑體" panose="020B0604030504040204" pitchFamily="34" charset="-120"/>
+              <a:ea typeface="微軟正黑體" panose="020B0604030504040204" pitchFamily="34" charset="-120"/>
+              <a:cs typeface="Heiti TC Light"/>
+            </a:endParaRPr>
+          </a:p>
+          <a:p>
+            <a:pPr marL="819150" lvl="1" indent="-361950">
+              <a:buFont typeface="Arial" panose="020B0604020202020204" pitchFamily="34" charset="0"/>
+              <a:buChar char="•"/>
+            </a:pPr>
+            <a:r>
+              <a:rPr kumimoji="1" lang="zh-TW" altLang="en-US" sz="2800" dirty="0">
+                <a:solidFill>
+                  <a:prstClr val="white"/>
+                </a:solidFill>
+                <a:effectLst>
+                  <a:outerShdw blurRad="38100" dist="38100" dir="2700000" algn="tl">
+                    <a:srgbClr val="000000">
+                      <a:alpha val="43137"/>
+                    </a:srgbClr>
+                  </a:outerShdw>
+                </a:effectLst>
+                <a:latin typeface="微軟正黑體" panose="020B0604030504040204" pitchFamily="34" charset="-120"/>
+                <a:ea typeface="微軟正黑體" panose="020B0604030504040204" pitchFamily="34" charset="-120"/>
+                <a:cs typeface="Heiti TC Light"/>
+              </a:rPr>
+              <a:t>不訓練微調，用提示語工程</a:t>
+            </a:r>
+            <a:endParaRPr kumimoji="1" lang="en-US" altLang="zh-TW" sz="2800" dirty="0">
+              <a:solidFill>
+                <a:prstClr val="white"/>
+              </a:solidFill>
+              <a:effectLst>
+                <a:outerShdw blurRad="38100" dist="38100" dir="2700000" algn="tl">
+                  <a:srgbClr val="000000">
+                    <a:alpha val="43137"/>
+                  </a:srgbClr>
+                </a:outerShdw>
+              </a:effectLst>
+              <a:latin typeface="微軟正黑體" panose="020B0604030504040204" pitchFamily="34" charset="-120"/>
+              <a:ea typeface="微軟正黑體" panose="020B0604030504040204" pitchFamily="34" charset="-120"/>
+              <a:cs typeface="Heiti TC Light"/>
+            </a:endParaRPr>
+          </a:p>
+          <a:p>
+            <a:pPr marL="819150" lvl="1" indent="-361950">
+              <a:buFont typeface="Arial" panose="020B0604020202020204" pitchFamily="34" charset="0"/>
+              <a:buChar char="•"/>
+            </a:pPr>
+            <a:endParaRPr kumimoji="1" lang="en-US" altLang="zh-TW" sz="2800" dirty="0">
+              <a:solidFill>
+                <a:prstClr val="white"/>
+              </a:solidFill>
+              <a:effectLst>
+                <a:outerShdw blurRad="38100" dist="38100" dir="2700000" algn="tl">
+                  <a:srgbClr val="000000">
+                    <a:alpha val="43137"/>
+                  </a:srgbClr>
+                </a:outerShdw>
+              </a:effectLst>
+              <a:latin typeface="微軟正黑體" panose="020B0604030504040204" pitchFamily="34" charset="-120"/>
+              <a:ea typeface="微軟正黑體" panose="020B0604030504040204" pitchFamily="34" charset="-120"/>
+              <a:cs typeface="Heiti TC Light"/>
+            </a:endParaRPr>
+          </a:p>
+          <a:p>
             <a:pPr marL="361950" indent="-361950">
               <a:buFont typeface="Arial" panose="020B0604020202020204" pitchFamily="34" charset="0"/>
               <a:buChar char="•"/>
             </a:pPr>
-            <a:endParaRPr kumimoji="1" lang="en-US" altLang="zh-TW" sz="3200" dirty="0">
+            <a:endParaRPr kumimoji="1" lang="en-US" altLang="zh-TW" sz="2800" dirty="0">
               <a:solidFill>
                 <a:prstClr val="white"/>
               </a:solidFill>
